--- a/pptx/figures/REMUS_Checkpoint_and_Replay.pptx
+++ b/pptx/figures/REMUS_Checkpoint_and_Replay.pptx
@@ -5,10 +5,10 @@
     <p:sldMasterId xmlns:r="http://schemas.openxmlformats.org/officeDocument/2006/relationships" id="2147483648" r:id="rId1"/>
   </p:sldMasterIdLst>
   <p:notesMasterIdLst>
-    <p:notesMasterId r:id="Rbfffad1effc4479b"/>
+    <p:notesMasterId r:id="R2819fe59e8254bc0"/>
   </p:notesMasterIdLst>
   <p:sldIdLst>
-    <p:sldId id="256" r:id="Rc319a83fa40e4d9a"/>
+    <p:sldId id="256" r:id="R214aed1348674d3f"/>
   </p:sldIdLst>
   <p:sldSz cx="14630400" cy="7315200" type="custom"/>
   <p:notesSz cx="6858000" cy="9144000"/>
@@ -1375,10 +1375,12 @@
             <a:avLst/>
           </a:prstGeom>
           <a:solidFill>
-            <a:srgbClr val="EDF0F3"/>
+            <a:srgbClr val="C5D7E5"/>
           </a:solidFill>
-          <a:ln>
-            <a:noFill/>
+          <a:ln w="12700">
+            <a:solidFill>
+              <a:srgbClr val="8BA7BC"/>
+            </a:solidFill>
           </a:ln>
         </p:spPr>
         <p:txBody>
@@ -2072,10 +2074,12 @@
             <a:avLst/>
           </a:prstGeom>
           <a:solidFill>
-            <a:srgbClr val="EDF0F3"/>
+            <a:srgbClr val="C5D7E5"/>
           </a:solidFill>
-          <a:ln>
-            <a:noFill/>
+          <a:ln w="12700">
+            <a:solidFill>
+              <a:srgbClr val="8BA7BC"/>
+            </a:solidFill>
           </a:ln>
         </p:spPr>
         <p:txBody>
@@ -2460,63 +2464,9 @@
           </a:ln>
         </p:spPr>
       </p:cxnSp>
-      <p:sp>
-        <p:nvSpPr>
-          <p:cNvPr id="100042" name="Host.CollectLabel"/>
-          <p:cNvSpPr txBox="1"/>
-          <p:nvPr/>
-        </p:nvSpPr>
-        <p:spPr>
-          <a:xfrm>
-            <a:off x="4615891" y="3160166"/>
-            <a:ext cx="833933" cy="570586"/>
-          </a:xfrm>
-          <a:prstGeom prst="rect">
-            <a:avLst/>
-          </a:prstGeom>
-          <a:solidFill>
-            <a:srgbClr val="FFFFFF"/>
-          </a:solidFill>
-          <a:ln>
-            <a:noFill/>
-          </a:ln>
-        </p:spPr>
-        <p:txBody>
-          <a:bodyPr lIns="0" tIns="0" rIns="0" bIns="0" anchor="ctr">
-            <a:noAutofit/>
-          </a:bodyPr>
-          <a:lstStyle/>
-          <a:p>
-            <a:pPr algn="ctr"/>
-            <a:r>
-              <a:rPr lang="en-US" sz="1200">
-                <a:solidFill>
-                  <a:srgbClr val="183B56"/>
-                </a:solidFill>
-                <a:latin typeface="Arial"/>
-                <a:ea typeface="Arial"/>
-              </a:rPr>
-              <a:t>Host</a:t>
-            </a:r>
-          </a:p>
-          <a:p>
-            <a:pPr algn="ctr"/>
-            <a:r>
-              <a:rPr lang="en-US" sz="1200">
-                <a:solidFill>
-                  <a:srgbClr val="183B56"/>
-                </a:solidFill>
-                <a:latin typeface="Arial"/>
-                <a:ea typeface="Arial"/>
-              </a:rPr>
-              <a:t>collection</a:t>
-            </a:r>
-          </a:p>
-        </p:txBody>
-      </p:sp>
       <p:grpSp>
         <p:nvGrpSpPr>
-          <p:cNvPr id="100045" name="Host.RootFolder"/>
+          <p:cNvPr id="100044" name="Host.RootFolder"/>
           <p:cNvGrpSpPr/>
           <p:nvPr/>
         </p:nvGrpSpPr>
@@ -2530,7 +2480,7 @@
         </p:grpSpPr>
         <p:sp>
           <p:nvSpPr>
-            <p:cNvPr id="100043" name="Host.RootFolder.Tab"/>
+            <p:cNvPr id="100042" name="Host.RootFolder.Tab"/>
             <p:cNvSpPr/>
             <p:nvPr/>
           </p:nvSpPr>
@@ -2570,7 +2520,7 @@
         </p:sp>
         <p:sp>
           <p:nvSpPr>
-            <p:cNvPr id="100044" name="Host.RootFolder.Body"/>
+            <p:cNvPr id="100043" name="Host.RootFolder.Body"/>
             <p:cNvSpPr/>
             <p:nvPr/>
           </p:nvSpPr>
@@ -2613,7 +2563,7 @@
       </p:grpSp>
       <p:sp>
         <p:nvSpPr>
-          <p:cNvPr id="100046" name="Host.RootLabel"/>
+          <p:cNvPr id="100045" name="Host.RootLabel"/>
           <p:cNvSpPr txBox="1"/>
           <p:nvPr/>
         </p:nvSpPr>
@@ -2652,7 +2602,7 @@
       </p:sp>
       <p:sp>
         <p:nvSpPr>
-          <p:cNvPr id="100047" name="Checkpoint.Cycle100"/>
+          <p:cNvPr id="100046" name="Checkpoint.Cycle100"/>
           <p:cNvSpPr/>
           <p:nvPr/>
         </p:nvSpPr>
@@ -2694,7 +2644,7 @@
       </p:sp>
       <p:sp>
         <p:nvSpPr>
-          <p:cNvPr id="100048" name="Checkpoint.Cycle100Label"/>
+          <p:cNvPr id="100047" name="Checkpoint.Cycle100Label"/>
           <p:cNvSpPr txBox="1"/>
           <p:nvPr/>
         </p:nvSpPr>
@@ -2733,7 +2683,7 @@
       </p:sp>
       <p:sp>
         <p:nvSpPr>
-          <p:cNvPr id="100049" name="Checkpoint.Cycle20"/>
+          <p:cNvPr id="100048" name="Checkpoint.Cycle20"/>
           <p:cNvSpPr/>
           <p:nvPr/>
         </p:nvSpPr>
@@ -2775,7 +2725,7 @@
       </p:sp>
       <p:sp>
         <p:nvSpPr>
-          <p:cNvPr id="100050" name="Checkpoint.Cycle20Label"/>
+          <p:cNvPr id="100049" name="Checkpoint.Cycle20Label"/>
           <p:cNvSpPr txBox="1"/>
           <p:nvPr/>
         </p:nvSpPr>
@@ -2814,7 +2764,7 @@
       </p:sp>
       <p:sp>
         <p:nvSpPr>
-          <p:cNvPr id="100051" name="Checkpoint.Cycle0"/>
+          <p:cNvPr id="100050" name="Checkpoint.Cycle0"/>
           <p:cNvSpPr/>
           <p:nvPr/>
         </p:nvSpPr>
@@ -2856,7 +2806,7 @@
       </p:sp>
       <p:grpSp>
         <p:nvGrpSpPr>
-          <p:cNvPr id="100054" name="Checkpoint.Cycle0Folder"/>
+          <p:cNvPr id="100053" name="Checkpoint.Cycle0Folder"/>
           <p:cNvGrpSpPr/>
           <p:nvPr/>
         </p:nvGrpSpPr>
@@ -2870,7 +2820,7 @@
         </p:grpSpPr>
         <p:sp>
           <p:nvSpPr>
-            <p:cNvPr id="100052" name="Checkpoint.Cycle0Folder.Tab"/>
+            <p:cNvPr id="100051" name="Checkpoint.Cycle0Folder.Tab"/>
             <p:cNvSpPr/>
             <p:nvPr/>
           </p:nvSpPr>
@@ -2910,7 +2860,7 @@
         </p:sp>
         <p:sp>
           <p:nvSpPr>
-            <p:cNvPr id="100053" name="Checkpoint.Cycle0Folder.Body"/>
+            <p:cNvPr id="100052" name="Checkpoint.Cycle0Folder.Body"/>
             <p:cNvSpPr/>
             <p:nvPr/>
           </p:nvSpPr>
@@ -2953,7 +2903,7 @@
       </p:grpSp>
       <p:sp>
         <p:nvSpPr>
-          <p:cNvPr id="100055" name="Checkpoint.Cycle0Label"/>
+          <p:cNvPr id="100054" name="Checkpoint.Cycle0Label"/>
           <p:cNvSpPr txBox="1"/>
           <p:nvPr/>
         </p:nvSpPr>
@@ -2992,7 +2942,7 @@
       </p:sp>
       <p:grpSp>
         <p:nvGrpSpPr>
-          <p:cNvPr id="100058" name="Checkpoint.Part0"/>
+          <p:cNvPr id="100057" name="Checkpoint.Part0"/>
           <p:cNvGrpSpPr/>
           <p:nvPr/>
         </p:nvGrpSpPr>
@@ -3006,7 +2956,7 @@
         </p:grpSpPr>
         <p:sp>
           <p:nvSpPr>
-            <p:cNvPr id="100056" name="Checkpoint.Part0.Page"/>
+            <p:cNvPr id="100055" name="Checkpoint.Part0.Page"/>
             <p:cNvSpPr/>
             <p:nvPr/>
           </p:nvSpPr>
@@ -3046,7 +2996,7 @@
         </p:sp>
         <p:sp>
           <p:nvSpPr>
-            <p:cNvPr id="100057" name="Checkpoint.Part0.Text"/>
+            <p:cNvPr id="100056" name="Checkpoint.Part0.Text"/>
             <p:cNvSpPr txBox="1"/>
             <p:nvPr/>
           </p:nvSpPr>
@@ -3099,7 +3049,7 @@
       </p:grpSp>
       <p:grpSp>
         <p:nvGrpSpPr>
-          <p:cNvPr id="100061" name="Checkpoint.Part1"/>
+          <p:cNvPr id="100060" name="Checkpoint.Part1"/>
           <p:cNvGrpSpPr/>
           <p:nvPr/>
         </p:nvGrpSpPr>
@@ -3113,7 +3063,7 @@
         </p:grpSpPr>
         <p:sp>
           <p:nvSpPr>
-            <p:cNvPr id="100059" name="Checkpoint.Part1.Page"/>
+            <p:cNvPr id="100058" name="Checkpoint.Part1.Page"/>
             <p:cNvSpPr/>
             <p:nvPr/>
           </p:nvSpPr>
@@ -3153,7 +3103,7 @@
         </p:sp>
         <p:sp>
           <p:nvSpPr>
-            <p:cNvPr id="100060" name="Checkpoint.Part1.Text"/>
+            <p:cNvPr id="100059" name="Checkpoint.Part1.Text"/>
             <p:cNvSpPr txBox="1"/>
             <p:nvPr/>
           </p:nvSpPr>
@@ -3206,7 +3156,7 @@
       </p:grpSp>
       <p:grpSp>
         <p:nvGrpSpPr>
-          <p:cNvPr id="100064" name="Checkpoint.Memory"/>
+          <p:cNvPr id="100063" name="Checkpoint.Memory"/>
           <p:cNvGrpSpPr/>
           <p:nvPr/>
         </p:nvGrpSpPr>
@@ -3220,7 +3170,7 @@
         </p:grpSpPr>
         <p:sp>
           <p:nvSpPr>
-            <p:cNvPr id="100062" name="Checkpoint.Memory.Page"/>
+            <p:cNvPr id="100061" name="Checkpoint.Memory.Page"/>
             <p:cNvSpPr/>
             <p:nvPr/>
           </p:nvSpPr>
@@ -3260,7 +3210,7 @@
         </p:sp>
         <p:sp>
           <p:nvSpPr>
-            <p:cNvPr id="100063" name="Checkpoint.Memory.Text"/>
+            <p:cNvPr id="100062" name="Checkpoint.Memory.Text"/>
             <p:cNvSpPr txBox="1"/>
             <p:nvPr/>
           </p:nvSpPr>
@@ -3313,7 +3263,7 @@
       </p:grpSp>
       <p:sp>
         <p:nvSpPr>
-          <p:cNvPr id="100065" name="Checkpoint.SameCycle"/>
+          <p:cNvPr id="100064" name="Checkpoint.SameCycle"/>
           <p:cNvSpPr txBox="1"/>
           <p:nvPr/>
         </p:nvSpPr>
@@ -3350,48 +3300,9 @@
           </a:p>
         </p:txBody>
       </p:sp>
-      <p:sp>
-        <p:nvSpPr>
-          <p:cNvPr id="100066" name="Checkpoint.CycleNote"/>
-          <p:cNvSpPr txBox="1"/>
-          <p:nvPr/>
-        </p:nvSpPr>
-        <p:spPr>
-          <a:xfrm>
-            <a:off x="5618074" y="4930445"/>
-            <a:ext cx="3891686" cy="277978"/>
-          </a:xfrm>
-          <a:prstGeom prst="rect">
-            <a:avLst/>
-          </a:prstGeom>
-          <a:noFill/>
-          <a:ln>
-            <a:noFill/>
-          </a:ln>
-        </p:spPr>
-        <p:txBody>
-          <a:bodyPr lIns="0" tIns="0" rIns="0" bIns="0" anchor="ctr">
-            <a:noAutofit/>
-          </a:bodyPr>
-          <a:lstStyle/>
-          <a:p>
-            <a:pPr algn="ctr"/>
-            <a:r>
-              <a:rPr lang="en-US" sz="1600">
-                <a:solidFill>
-                  <a:srgbClr val="607184"/>
-                </a:solidFill>
-                <a:latin typeface="Arial"/>
-                <a:ea typeface="Arial"/>
-              </a:rPr>
-              <a:t>Illustrative checkpoint cycles</a:t>
-            </a:r>
-          </a:p>
-        </p:txBody>
-      </p:sp>
       <p:grpSp>
         <p:nvGrpSpPr>
-          <p:cNvPr id="100069" name="Aux.Input"/>
+          <p:cNvPr id="100067" name="Aux.Input"/>
           <p:cNvGrpSpPr/>
           <p:nvPr/>
         </p:nvGrpSpPr>
@@ -3405,7 +3316,7 @@
         </p:grpSpPr>
         <p:sp>
           <p:nvSpPr>
-            <p:cNvPr id="100067" name="Aux.Input.Page"/>
+            <p:cNvPr id="100065" name="Aux.Input.Page"/>
             <p:cNvSpPr/>
             <p:nvPr/>
           </p:nvSpPr>
@@ -3445,7 +3356,7 @@
         </p:sp>
         <p:sp>
           <p:nvSpPr>
-            <p:cNvPr id="100068" name="Aux.Input.Text"/>
+            <p:cNvPr id="100066" name="Aux.Input.Text"/>
             <p:cNvSpPr txBox="1"/>
             <p:nvPr/>
           </p:nvSpPr>
@@ -3485,7 +3396,7 @@
       </p:grpSp>
       <p:grpSp>
         <p:nvGrpSpPr>
-          <p:cNvPr id="100072" name="Aux.Mapping"/>
+          <p:cNvPr id="100070" name="Aux.Mapping"/>
           <p:cNvGrpSpPr/>
           <p:nvPr/>
         </p:nvGrpSpPr>
@@ -3499,7 +3410,7 @@
         </p:grpSpPr>
         <p:sp>
           <p:nvSpPr>
-            <p:cNvPr id="100070" name="Aux.Mapping.Page"/>
+            <p:cNvPr id="100068" name="Aux.Mapping.Page"/>
             <p:cNvSpPr/>
             <p:nvPr/>
           </p:nvSpPr>
@@ -3539,7 +3450,7 @@
         </p:sp>
         <p:sp>
           <p:nvSpPr>
-            <p:cNvPr id="100071" name="Aux.Mapping.Text"/>
+            <p:cNvPr id="100069" name="Aux.Mapping.Text"/>
             <p:cNvSpPr txBox="1"/>
             <p:nvPr/>
           </p:nvSpPr>
@@ -3592,7 +3503,7 @@
       </p:grpSp>
       <p:sp>
         <p:nvSpPr>
-          <p:cNvPr id="100073" name="Aux.Heading"/>
+          <p:cNvPr id="100071" name="Aux.Heading"/>
           <p:cNvSpPr txBox="1"/>
           <p:nvPr/>
         </p:nvSpPr>
@@ -3631,7 +3542,7 @@
       </p:sp>
       <p:cxnSp>
         <p:nvCxnSpPr>
-          <p:cNvPr id="100074" name="Restore.SelectedSnapshot"/>
+          <p:cNvPr id="100072" name="Restore.SelectedSnapshot"/>
           <p:cNvCxnSpPr/>
           <p:nvPr/>
         </p:nvCxnSpPr>
@@ -3655,7 +3566,7 @@
       </p:cxnSp>
       <p:cxnSp>
         <p:nvCxnSpPr>
-          <p:cNvPr id="100075" name="Restore.PathBus"/>
+          <p:cNvPr id="100073" name="Restore.PathBus"/>
           <p:cNvCxnSpPr/>
           <p:nvPr/>
         </p:nvCxnSpPr>
@@ -3679,7 +3590,7 @@
       </p:cxnSp>
       <p:cxnSp>
         <p:nvCxnSpPr>
-          <p:cNvPr id="100076" name="Restore.HardwareArrow"/>
+          <p:cNvPr id="100074" name="Restore.HardwareArrow"/>
           <p:cNvCxnSpPr/>
           <p:nvPr/>
         </p:nvCxnSpPr>
@@ -3703,7 +3614,7 @@
       </p:cxnSp>
       <p:cxnSp>
         <p:nvCxnSpPr>
-          <p:cNvPr id="100077" name="Restore.SoftwareArrow"/>
+          <p:cNvPr id="100075" name="Restore.SoftwareArrow"/>
           <p:cNvCxnSpPr/>
           <p:nvPr/>
         </p:nvCxnSpPr>
@@ -3727,7 +3638,7 @@
       </p:cxnSp>
       <p:sp>
         <p:nvSpPr>
-          <p:cNvPr id="100078" name="Restore.Panel"/>
+          <p:cNvPr id="100076" name="Restore.Panel"/>
           <p:cNvSpPr/>
           <p:nvPr/>
         </p:nvSpPr>
@@ -3769,7 +3680,7 @@
       </p:sp>
       <p:sp>
         <p:nvSpPr>
-          <p:cNvPr id="100079" name="Restore.Title"/>
+          <p:cNvPr id="100077" name="Restore.Title"/>
           <p:cNvSpPr txBox="1"/>
           <p:nvPr/>
         </p:nvSpPr>
@@ -3808,50 +3719,48 @@
       </p:sp>
       <p:grpSp>
         <p:nvGrpSpPr>
-          <p:cNvPr id="100150" name="Restore.Chips"/>
+          <p:cNvPr id="100145" name="Restore.Chips"/>
           <p:cNvGrpSpPr/>
           <p:nvPr/>
         </p:nvGrpSpPr>
         <p:grpSpPr>
           <a:xfrm>
-            <a:off x="11638483" y="1631290"/>
-            <a:ext cx="1565453" cy="1565452"/>
-            <a:chOff x="11638483" y="1631290"/>
-            <a:chExt cx="1565453" cy="1565452"/>
+            <a:off x="11667744" y="1660550"/>
+            <a:ext cx="1506931" cy="1506932"/>
+            <a:chOff x="11667744" y="1660550"/>
+            <a:chExt cx="1506931" cy="1506932"/>
           </a:xfrm>
         </p:grpSpPr>
         <p:grpSp>
           <p:nvGrpSpPr>
-            <p:cNvPr id="100102" name="Restore.Chips.Chip2"/>
+            <p:cNvPr id="100099" name="Restore.Chips.Chip2"/>
             <p:cNvGrpSpPr/>
             <p:nvPr/>
           </p:nvGrpSpPr>
           <p:grpSpPr>
             <a:xfrm>
-              <a:off x="12135917" y="1631290"/>
-              <a:ext cx="1068019" cy="1068019"/>
-              <a:chOff x="12135917" y="1631290"/>
-              <a:chExt cx="1068019" cy="1068019"/>
+              <a:off x="12165178" y="1660550"/>
+              <a:ext cx="1009497" cy="1009498"/>
+              <a:chOff x="12165178" y="1660550"/>
+              <a:chExt cx="1009497" cy="1009498"/>
             </a:xfrm>
           </p:grpSpPr>
           <p:sp>
             <p:nvSpPr>
-              <p:cNvPr id="100080" name="Restore.Chips.Chip2.Halo"/>
+              <p:cNvPr id="100078" name="Restore.Chips.Chip2.Top0"/>
               <p:cNvSpPr/>
               <p:nvPr/>
             </p:nvSpPr>
             <p:spPr>
               <a:xfrm>
-                <a:off x="12135917" y="1631290"/>
-                <a:ext cx="1068019" cy="1068019"/>
+                <a:off x="12367809" y="1660550"/>
+                <a:ext cx="51206" cy="73152"/>
               </a:xfrm>
-              <a:prstGeom prst="roundRect">
-                <a:avLst>
-                  <a:gd name="adj" fmla="val 4500"/>
-                </a:avLst>
+              <a:prstGeom prst="rect">
+                <a:avLst/>
               </a:prstGeom>
               <a:solidFill>
-                <a:srgbClr val="EAF4F3"/>
+                <a:srgbClr val="183B56"/>
               </a:solidFill>
               <a:ln>
                 <a:noFill/>
@@ -3876,13 +3785,13 @@
           </p:sp>
           <p:sp>
             <p:nvSpPr>
-              <p:cNvPr id="100081" name="Restore.Chips.Chip2.Top0"/>
+              <p:cNvPr id="100079" name="Restore.Chips.Chip2.Bottom0"/>
               <p:cNvSpPr/>
               <p:nvPr/>
             </p:nvSpPr>
             <p:spPr>
               <a:xfrm>
-                <a:off x="12367809" y="1660550"/>
+                <a:off x="12367809" y="2596896"/>
                 <a:ext cx="51206" cy="73152"/>
               </a:xfrm>
               <a:prstGeom prst="rect">
@@ -3914,14 +3823,14 @@
           </p:sp>
           <p:sp>
             <p:nvSpPr>
-              <p:cNvPr id="100082" name="Restore.Chips.Chip2.Bottom0"/>
+              <p:cNvPr id="100080" name="Restore.Chips.Chip2.Left0"/>
               <p:cNvSpPr/>
               <p:nvPr/>
             </p:nvSpPr>
             <p:spPr>
               <a:xfrm>
-                <a:off x="12367809" y="2596896"/>
-                <a:ext cx="51206" cy="73152"/>
+                <a:off x="12165178" y="1863181"/>
+                <a:ext cx="73152" cy="51206"/>
               </a:xfrm>
               <a:prstGeom prst="rect">
                 <a:avLst/>
@@ -3952,13 +3861,13 @@
           </p:sp>
           <p:sp>
             <p:nvSpPr>
-              <p:cNvPr id="100083" name="Restore.Chips.Chip2.Left0"/>
+              <p:cNvPr id="100081" name="Restore.Chips.Chip2.Right0"/>
               <p:cNvSpPr/>
               <p:nvPr/>
             </p:nvSpPr>
             <p:spPr>
               <a:xfrm>
-                <a:off x="12165178" y="1863181"/>
+                <a:off x="13101523" y="1863181"/>
                 <a:ext cx="73152" cy="51206"/>
               </a:xfrm>
               <a:prstGeom prst="rect">
@@ -3990,14 +3899,14 @@
           </p:sp>
           <p:sp>
             <p:nvSpPr>
-              <p:cNvPr id="100084" name="Restore.Chips.Chip2.Right0"/>
+              <p:cNvPr id="100082" name="Restore.Chips.Chip2.Top1"/>
               <p:cNvSpPr/>
               <p:nvPr/>
             </p:nvSpPr>
             <p:spPr>
               <a:xfrm>
-                <a:off x="13101523" y="1863181"/>
-                <a:ext cx="73152" cy="51206"/>
+                <a:off x="12501604" y="1660550"/>
+                <a:ext cx="51206" cy="73152"/>
               </a:xfrm>
               <a:prstGeom prst="rect">
                 <a:avLst/>
@@ -4028,13 +3937,13 @@
           </p:sp>
           <p:sp>
             <p:nvSpPr>
-              <p:cNvPr id="100085" name="Restore.Chips.Chip2.Top1"/>
+              <p:cNvPr id="100083" name="Restore.Chips.Chip2.Bottom1"/>
               <p:cNvSpPr/>
               <p:nvPr/>
             </p:nvSpPr>
             <p:spPr>
               <a:xfrm>
-                <a:off x="12501604" y="1660550"/>
+                <a:off x="12501604" y="2596896"/>
                 <a:ext cx="51206" cy="73152"/>
               </a:xfrm>
               <a:prstGeom prst="rect">
@@ -4066,14 +3975,14 @@
           </p:sp>
           <p:sp>
             <p:nvSpPr>
-              <p:cNvPr id="100086" name="Restore.Chips.Chip2.Bottom1"/>
+              <p:cNvPr id="100084" name="Restore.Chips.Chip2.Left1"/>
               <p:cNvSpPr/>
               <p:nvPr/>
             </p:nvSpPr>
             <p:spPr>
               <a:xfrm>
-                <a:off x="12501604" y="2596896"/>
-                <a:ext cx="51206" cy="73152"/>
+                <a:off x="12165178" y="1996976"/>
+                <a:ext cx="73152" cy="51206"/>
               </a:xfrm>
               <a:prstGeom prst="rect">
                 <a:avLst/>
@@ -4104,13 +4013,13 @@
           </p:sp>
           <p:sp>
             <p:nvSpPr>
-              <p:cNvPr id="100087" name="Restore.Chips.Chip2.Left1"/>
+              <p:cNvPr id="100085" name="Restore.Chips.Chip2.Right1"/>
               <p:cNvSpPr/>
               <p:nvPr/>
             </p:nvSpPr>
             <p:spPr>
               <a:xfrm>
-                <a:off x="12165178" y="1996976"/>
+                <a:off x="13101523" y="1996976"/>
                 <a:ext cx="73152" cy="51206"/>
               </a:xfrm>
               <a:prstGeom prst="rect">
@@ -4142,14 +4051,14 @@
           </p:sp>
           <p:sp>
             <p:nvSpPr>
-              <p:cNvPr id="100088" name="Restore.Chips.Chip2.Right1"/>
+              <p:cNvPr id="100086" name="Restore.Chips.Chip2.Top2"/>
               <p:cNvSpPr/>
               <p:nvPr/>
             </p:nvSpPr>
             <p:spPr>
               <a:xfrm>
-                <a:off x="13101523" y="1996976"/>
-                <a:ext cx="73152" cy="51206"/>
+                <a:off x="12635399" y="1660550"/>
+                <a:ext cx="51206" cy="73152"/>
               </a:xfrm>
               <a:prstGeom prst="rect">
                 <a:avLst/>
@@ -4180,13 +4089,13 @@
           </p:sp>
           <p:sp>
             <p:nvSpPr>
-              <p:cNvPr id="100089" name="Restore.Chips.Chip2.Top2"/>
+              <p:cNvPr id="100087" name="Restore.Chips.Chip2.Bottom2"/>
               <p:cNvSpPr/>
               <p:nvPr/>
             </p:nvSpPr>
             <p:spPr>
               <a:xfrm>
-                <a:off x="12635399" y="1660550"/>
+                <a:off x="12635399" y="2596896"/>
                 <a:ext cx="51206" cy="73152"/>
               </a:xfrm>
               <a:prstGeom prst="rect">
@@ -4218,14 +4127,14 @@
           </p:sp>
           <p:sp>
             <p:nvSpPr>
-              <p:cNvPr id="100090" name="Restore.Chips.Chip2.Bottom2"/>
+              <p:cNvPr id="100088" name="Restore.Chips.Chip2.Left2"/>
               <p:cNvSpPr/>
               <p:nvPr/>
             </p:nvSpPr>
             <p:spPr>
               <a:xfrm>
-                <a:off x="12635399" y="2596896"/>
-                <a:ext cx="51206" cy="73152"/>
+                <a:off x="12165178" y="2130771"/>
+                <a:ext cx="73152" cy="51206"/>
               </a:xfrm>
               <a:prstGeom prst="rect">
                 <a:avLst/>
@@ -4256,13 +4165,13 @@
           </p:sp>
           <p:sp>
             <p:nvSpPr>
-              <p:cNvPr id="100091" name="Restore.Chips.Chip2.Left2"/>
+              <p:cNvPr id="100089" name="Restore.Chips.Chip2.Right2"/>
               <p:cNvSpPr/>
               <p:nvPr/>
             </p:nvSpPr>
             <p:spPr>
               <a:xfrm>
-                <a:off x="12165178" y="2130771"/>
+                <a:off x="13101523" y="2130771"/>
                 <a:ext cx="73152" cy="51206"/>
               </a:xfrm>
               <a:prstGeom prst="rect">
@@ -4294,14 +4203,14 @@
           </p:sp>
           <p:sp>
             <p:nvSpPr>
-              <p:cNvPr id="100092" name="Restore.Chips.Chip2.Right2"/>
+              <p:cNvPr id="100090" name="Restore.Chips.Chip2.Top3"/>
               <p:cNvSpPr/>
               <p:nvPr/>
             </p:nvSpPr>
             <p:spPr>
               <a:xfrm>
-                <a:off x="13101523" y="2130771"/>
-                <a:ext cx="73152" cy="51206"/>
+                <a:off x="12769194" y="1660550"/>
+                <a:ext cx="51206" cy="73152"/>
               </a:xfrm>
               <a:prstGeom prst="rect">
                 <a:avLst/>
@@ -4332,13 +4241,13 @@
           </p:sp>
           <p:sp>
             <p:nvSpPr>
-              <p:cNvPr id="100093" name="Restore.Chips.Chip2.Top3"/>
+              <p:cNvPr id="100091" name="Restore.Chips.Chip2.Bottom3"/>
               <p:cNvSpPr/>
               <p:nvPr/>
             </p:nvSpPr>
             <p:spPr>
               <a:xfrm>
-                <a:off x="12769194" y="1660550"/>
+                <a:off x="12769194" y="2596896"/>
                 <a:ext cx="51206" cy="73152"/>
               </a:xfrm>
               <a:prstGeom prst="rect">
@@ -4370,14 +4279,14 @@
           </p:sp>
           <p:sp>
             <p:nvSpPr>
-              <p:cNvPr id="100094" name="Restore.Chips.Chip2.Bottom3"/>
+              <p:cNvPr id="100092" name="Restore.Chips.Chip2.Left3"/>
               <p:cNvSpPr/>
               <p:nvPr/>
             </p:nvSpPr>
             <p:spPr>
               <a:xfrm>
-                <a:off x="12769194" y="2596896"/>
-                <a:ext cx="51206" cy="73152"/>
+                <a:off x="12165178" y="2264566"/>
+                <a:ext cx="73152" cy="51206"/>
               </a:xfrm>
               <a:prstGeom prst="rect">
                 <a:avLst/>
@@ -4408,13 +4317,13 @@
           </p:sp>
           <p:sp>
             <p:nvSpPr>
-              <p:cNvPr id="100095" name="Restore.Chips.Chip2.Left3"/>
+              <p:cNvPr id="100093" name="Restore.Chips.Chip2.Right3"/>
               <p:cNvSpPr/>
               <p:nvPr/>
             </p:nvSpPr>
             <p:spPr>
               <a:xfrm>
-                <a:off x="12165178" y="2264566"/>
+                <a:off x="13101523" y="2264566"/>
                 <a:ext cx="73152" cy="51206"/>
               </a:xfrm>
               <a:prstGeom prst="rect">
@@ -4446,14 +4355,14 @@
           </p:sp>
           <p:sp>
             <p:nvSpPr>
-              <p:cNvPr id="100096" name="Restore.Chips.Chip2.Right3"/>
+              <p:cNvPr id="100094" name="Restore.Chips.Chip2.Top4"/>
               <p:cNvSpPr/>
               <p:nvPr/>
             </p:nvSpPr>
             <p:spPr>
               <a:xfrm>
-                <a:off x="13101523" y="2264566"/>
-                <a:ext cx="73152" cy="51206"/>
+                <a:off x="12902989" y="1660550"/>
+                <a:ext cx="51206" cy="73152"/>
               </a:xfrm>
               <a:prstGeom prst="rect">
                 <a:avLst/>
@@ -4484,13 +4393,13 @@
           </p:sp>
           <p:sp>
             <p:nvSpPr>
-              <p:cNvPr id="100097" name="Restore.Chips.Chip2.Top4"/>
+              <p:cNvPr id="100095" name="Restore.Chips.Chip2.Bottom4"/>
               <p:cNvSpPr/>
               <p:nvPr/>
             </p:nvSpPr>
             <p:spPr>
               <a:xfrm>
-                <a:off x="12902989" y="1660550"/>
+                <a:off x="12902989" y="2596896"/>
                 <a:ext cx="51206" cy="73152"/>
               </a:xfrm>
               <a:prstGeom prst="rect">
@@ -4522,14 +4431,14 @@
           </p:sp>
           <p:sp>
             <p:nvSpPr>
-              <p:cNvPr id="100098" name="Restore.Chips.Chip2.Bottom4"/>
+              <p:cNvPr id="100096" name="Restore.Chips.Chip2.Left4"/>
               <p:cNvSpPr/>
               <p:nvPr/>
             </p:nvSpPr>
             <p:spPr>
               <a:xfrm>
-                <a:off x="12902989" y="2596896"/>
-                <a:ext cx="51206" cy="73152"/>
+                <a:off x="12165178" y="2398361"/>
+                <a:ext cx="73152" cy="51206"/>
               </a:xfrm>
               <a:prstGeom prst="rect">
                 <a:avLst/>
@@ -4560,13 +4469,13 @@
           </p:sp>
           <p:sp>
             <p:nvSpPr>
-              <p:cNvPr id="100099" name="Restore.Chips.Chip2.Left4"/>
+              <p:cNvPr id="100097" name="Restore.Chips.Chip2.Right4"/>
               <p:cNvSpPr/>
               <p:nvPr/>
             </p:nvSpPr>
             <p:spPr>
               <a:xfrm>
-                <a:off x="12165178" y="2398361"/>
+                <a:off x="13101523" y="2398361"/>
                 <a:ext cx="73152" cy="51206"/>
               </a:xfrm>
               <a:prstGeom prst="rect">
@@ -4598,45 +4507,7 @@
           </p:sp>
           <p:sp>
             <p:nvSpPr>
-              <p:cNvPr id="100100" name="Restore.Chips.Chip2.Right4"/>
-              <p:cNvSpPr/>
-              <p:nvPr/>
-            </p:nvSpPr>
-            <p:spPr>
-              <a:xfrm>
-                <a:off x="13101523" y="2398361"/>
-                <a:ext cx="73152" cy="51206"/>
-              </a:xfrm>
-              <a:prstGeom prst="rect">
-                <a:avLst/>
-              </a:prstGeom>
-              <a:solidFill>
-                <a:srgbClr val="183B56"/>
-              </a:solidFill>
-              <a:ln>
-                <a:noFill/>
-              </a:ln>
-            </p:spPr>
-            <p:txBody>
-              <a:bodyPr lIns="0" tIns="0" rIns="0" bIns="0" anchor="ctr">
-                <a:noAutofit/>
-              </a:bodyPr>
-              <a:lstStyle/>
-              <a:p>
-                <a:pPr algn="ctr"/>
-                <a:endParaRPr lang="en-US" sz="1800">
-                  <a:solidFill>
-                    <a:srgbClr val="183B56"/>
-                  </a:solidFill>
-                  <a:latin typeface="Arial"/>
-                  <a:ea typeface="Arial"/>
-                </a:endParaRPr>
-              </a:p>
-            </p:txBody>
-          </p:sp>
-          <p:sp>
-            <p:nvSpPr>
-              <p:cNvPr id="100101" name="Restore.Chips.Chip2.Body"/>
+              <p:cNvPr id="100098" name="Restore.Chips.Chip2.Body"/>
               <p:cNvSpPr/>
               <p:nvPr/>
             </p:nvSpPr>
@@ -4679,36 +4550,34 @@
         </p:grpSp>
         <p:grpSp>
           <p:nvGrpSpPr>
-            <p:cNvPr id="100125" name="Restore.Chips.Chip1"/>
+            <p:cNvPr id="100121" name="Restore.Chips.Chip1"/>
             <p:cNvGrpSpPr/>
             <p:nvPr/>
           </p:nvGrpSpPr>
           <p:grpSpPr>
             <a:xfrm>
-              <a:off x="11887200" y="1880006"/>
-              <a:ext cx="1068019" cy="1068019"/>
-              <a:chOff x="11887200" y="1880006"/>
-              <a:chExt cx="1068019" cy="1068019"/>
+              <a:off x="11916461" y="1909267"/>
+              <a:ext cx="1009497" cy="1009498"/>
+              <a:chOff x="11916461" y="1909267"/>
+              <a:chExt cx="1009497" cy="1009498"/>
             </a:xfrm>
           </p:grpSpPr>
           <p:sp>
             <p:nvSpPr>
-              <p:cNvPr id="100103" name="Restore.Chips.Chip1.Halo"/>
+              <p:cNvPr id="100100" name="Restore.Chips.Chip1.Top0"/>
               <p:cNvSpPr/>
               <p:nvPr/>
             </p:nvSpPr>
             <p:spPr>
               <a:xfrm>
-                <a:off x="11887200" y="1880006"/>
-                <a:ext cx="1068019" cy="1068019"/>
+                <a:off x="12119092" y="1909267"/>
+                <a:ext cx="51206" cy="73152"/>
               </a:xfrm>
-              <a:prstGeom prst="roundRect">
-                <a:avLst>
-                  <a:gd name="adj" fmla="val 4500"/>
-                </a:avLst>
+              <a:prstGeom prst="rect">
+                <a:avLst/>
               </a:prstGeom>
               <a:solidFill>
-                <a:srgbClr val="EAF4F3"/>
+                <a:srgbClr val="183B56"/>
               </a:solidFill>
               <a:ln>
                 <a:noFill/>
@@ -4733,13 +4602,13 @@
           </p:sp>
           <p:sp>
             <p:nvSpPr>
-              <p:cNvPr id="100104" name="Restore.Chips.Chip1.Top0"/>
+              <p:cNvPr id="100101" name="Restore.Chips.Chip1.Bottom0"/>
               <p:cNvSpPr/>
               <p:nvPr/>
             </p:nvSpPr>
             <p:spPr>
               <a:xfrm>
-                <a:off x="12119092" y="1909267"/>
+                <a:off x="12119092" y="2845613"/>
                 <a:ext cx="51206" cy="73152"/>
               </a:xfrm>
               <a:prstGeom prst="rect">
@@ -4771,14 +4640,14 @@
           </p:sp>
           <p:sp>
             <p:nvSpPr>
-              <p:cNvPr id="100105" name="Restore.Chips.Chip1.Bottom0"/>
+              <p:cNvPr id="100102" name="Restore.Chips.Chip1.Left0"/>
               <p:cNvSpPr/>
               <p:nvPr/>
             </p:nvSpPr>
             <p:spPr>
               <a:xfrm>
-                <a:off x="12119092" y="2845613"/>
-                <a:ext cx="51206" cy="73152"/>
+                <a:off x="11916461" y="2111898"/>
+                <a:ext cx="73152" cy="51206"/>
               </a:xfrm>
               <a:prstGeom prst="rect">
                 <a:avLst/>
@@ -4809,13 +4678,13 @@
           </p:sp>
           <p:sp>
             <p:nvSpPr>
-              <p:cNvPr id="100106" name="Restore.Chips.Chip1.Left0"/>
+              <p:cNvPr id="100103" name="Restore.Chips.Chip1.Right0"/>
               <p:cNvSpPr/>
               <p:nvPr/>
             </p:nvSpPr>
             <p:spPr>
               <a:xfrm>
-                <a:off x="11916461" y="2111898"/>
+                <a:off x="12852806" y="2111898"/>
                 <a:ext cx="73152" cy="51206"/>
               </a:xfrm>
               <a:prstGeom prst="rect">
@@ -4847,14 +4716,14 @@
           </p:sp>
           <p:sp>
             <p:nvSpPr>
-              <p:cNvPr id="100107" name="Restore.Chips.Chip1.Right0"/>
+              <p:cNvPr id="100104" name="Restore.Chips.Chip1.Top1"/>
               <p:cNvSpPr/>
               <p:nvPr/>
             </p:nvSpPr>
             <p:spPr>
               <a:xfrm>
-                <a:off x="12852806" y="2111898"/>
-                <a:ext cx="73152" cy="51206"/>
+                <a:off x="12252887" y="1909267"/>
+                <a:ext cx="51206" cy="73152"/>
               </a:xfrm>
               <a:prstGeom prst="rect">
                 <a:avLst/>
@@ -4885,13 +4754,13 @@
           </p:sp>
           <p:sp>
             <p:nvSpPr>
-              <p:cNvPr id="100108" name="Restore.Chips.Chip1.Top1"/>
+              <p:cNvPr id="100105" name="Restore.Chips.Chip1.Bottom1"/>
               <p:cNvSpPr/>
               <p:nvPr/>
             </p:nvSpPr>
             <p:spPr>
               <a:xfrm>
-                <a:off x="12252887" y="1909267"/>
+                <a:off x="12252887" y="2845613"/>
                 <a:ext cx="51206" cy="73152"/>
               </a:xfrm>
               <a:prstGeom prst="rect">
@@ -4923,14 +4792,14 @@
           </p:sp>
           <p:sp>
             <p:nvSpPr>
-              <p:cNvPr id="100109" name="Restore.Chips.Chip1.Bottom1"/>
+              <p:cNvPr id="100106" name="Restore.Chips.Chip1.Left1"/>
               <p:cNvSpPr/>
               <p:nvPr/>
             </p:nvSpPr>
             <p:spPr>
               <a:xfrm>
-                <a:off x="12252887" y="2845613"/>
-                <a:ext cx="51206" cy="73152"/>
+                <a:off x="11916461" y="2245693"/>
+                <a:ext cx="73152" cy="51206"/>
               </a:xfrm>
               <a:prstGeom prst="rect">
                 <a:avLst/>
@@ -4961,13 +4830,13 @@
           </p:sp>
           <p:sp>
             <p:nvSpPr>
-              <p:cNvPr id="100110" name="Restore.Chips.Chip1.Left1"/>
+              <p:cNvPr id="100107" name="Restore.Chips.Chip1.Right1"/>
               <p:cNvSpPr/>
               <p:nvPr/>
             </p:nvSpPr>
             <p:spPr>
               <a:xfrm>
-                <a:off x="11916461" y="2245693"/>
+                <a:off x="12852806" y="2245693"/>
                 <a:ext cx="73152" cy="51206"/>
               </a:xfrm>
               <a:prstGeom prst="rect">
@@ -4999,14 +4868,14 @@
           </p:sp>
           <p:sp>
             <p:nvSpPr>
-              <p:cNvPr id="100111" name="Restore.Chips.Chip1.Right1"/>
+              <p:cNvPr id="100108" name="Restore.Chips.Chip1.Top2"/>
               <p:cNvSpPr/>
               <p:nvPr/>
             </p:nvSpPr>
             <p:spPr>
               <a:xfrm>
-                <a:off x="12852806" y="2245693"/>
-                <a:ext cx="73152" cy="51206"/>
+                <a:off x="12386682" y="1909267"/>
+                <a:ext cx="51206" cy="73152"/>
               </a:xfrm>
               <a:prstGeom prst="rect">
                 <a:avLst/>
@@ -5037,13 +4906,13 @@
           </p:sp>
           <p:sp>
             <p:nvSpPr>
-              <p:cNvPr id="100112" name="Restore.Chips.Chip1.Top2"/>
+              <p:cNvPr id="100109" name="Restore.Chips.Chip1.Bottom2"/>
               <p:cNvSpPr/>
               <p:nvPr/>
             </p:nvSpPr>
             <p:spPr>
               <a:xfrm>
-                <a:off x="12386682" y="1909267"/>
+                <a:off x="12386682" y="2845613"/>
                 <a:ext cx="51206" cy="73152"/>
               </a:xfrm>
               <a:prstGeom prst="rect">
@@ -5075,14 +4944,14 @@
           </p:sp>
           <p:sp>
             <p:nvSpPr>
-              <p:cNvPr id="100113" name="Restore.Chips.Chip1.Bottom2"/>
+              <p:cNvPr id="100110" name="Restore.Chips.Chip1.Left2"/>
               <p:cNvSpPr/>
               <p:nvPr/>
             </p:nvSpPr>
             <p:spPr>
               <a:xfrm>
-                <a:off x="12386682" y="2845613"/>
-                <a:ext cx="51206" cy="73152"/>
+                <a:off x="11916461" y="2379488"/>
+                <a:ext cx="73152" cy="51206"/>
               </a:xfrm>
               <a:prstGeom prst="rect">
                 <a:avLst/>
@@ -5113,13 +4982,13 @@
           </p:sp>
           <p:sp>
             <p:nvSpPr>
-              <p:cNvPr id="100114" name="Restore.Chips.Chip1.Left2"/>
+              <p:cNvPr id="100111" name="Restore.Chips.Chip1.Right2"/>
               <p:cNvSpPr/>
               <p:nvPr/>
             </p:nvSpPr>
             <p:spPr>
               <a:xfrm>
-                <a:off x="11916461" y="2379488"/>
+                <a:off x="12852806" y="2379488"/>
                 <a:ext cx="73152" cy="51206"/>
               </a:xfrm>
               <a:prstGeom prst="rect">
@@ -5151,14 +5020,14 @@
           </p:sp>
           <p:sp>
             <p:nvSpPr>
-              <p:cNvPr id="100115" name="Restore.Chips.Chip1.Right2"/>
+              <p:cNvPr id="100112" name="Restore.Chips.Chip1.Top3"/>
               <p:cNvSpPr/>
               <p:nvPr/>
             </p:nvSpPr>
             <p:spPr>
               <a:xfrm>
-                <a:off x="12852806" y="2379488"/>
-                <a:ext cx="73152" cy="51206"/>
+                <a:off x="12520477" y="1909267"/>
+                <a:ext cx="51206" cy="73152"/>
               </a:xfrm>
               <a:prstGeom prst="rect">
                 <a:avLst/>
@@ -5189,13 +5058,13 @@
           </p:sp>
           <p:sp>
             <p:nvSpPr>
-              <p:cNvPr id="100116" name="Restore.Chips.Chip1.Top3"/>
+              <p:cNvPr id="100113" name="Restore.Chips.Chip1.Bottom3"/>
               <p:cNvSpPr/>
               <p:nvPr/>
             </p:nvSpPr>
             <p:spPr>
               <a:xfrm>
-                <a:off x="12520477" y="1909267"/>
+                <a:off x="12520477" y="2845613"/>
                 <a:ext cx="51206" cy="73152"/>
               </a:xfrm>
               <a:prstGeom prst="rect">
@@ -5227,14 +5096,14 @@
           </p:sp>
           <p:sp>
             <p:nvSpPr>
-              <p:cNvPr id="100117" name="Restore.Chips.Chip1.Bottom3"/>
+              <p:cNvPr id="100114" name="Restore.Chips.Chip1.Left3"/>
               <p:cNvSpPr/>
               <p:nvPr/>
             </p:nvSpPr>
             <p:spPr>
               <a:xfrm>
-                <a:off x="12520477" y="2845613"/>
-                <a:ext cx="51206" cy="73152"/>
+                <a:off x="11916461" y="2513283"/>
+                <a:ext cx="73152" cy="51206"/>
               </a:xfrm>
               <a:prstGeom prst="rect">
                 <a:avLst/>
@@ -5265,13 +5134,13 @@
           </p:sp>
           <p:sp>
             <p:nvSpPr>
-              <p:cNvPr id="100118" name="Restore.Chips.Chip1.Left3"/>
+              <p:cNvPr id="100115" name="Restore.Chips.Chip1.Right3"/>
               <p:cNvSpPr/>
               <p:nvPr/>
             </p:nvSpPr>
             <p:spPr>
               <a:xfrm>
-                <a:off x="11916461" y="2513283"/>
+                <a:off x="12852806" y="2513283"/>
                 <a:ext cx="73152" cy="51206"/>
               </a:xfrm>
               <a:prstGeom prst="rect">
@@ -5303,14 +5172,14 @@
           </p:sp>
           <p:sp>
             <p:nvSpPr>
-              <p:cNvPr id="100119" name="Restore.Chips.Chip1.Right3"/>
+              <p:cNvPr id="100116" name="Restore.Chips.Chip1.Top4"/>
               <p:cNvSpPr/>
               <p:nvPr/>
             </p:nvSpPr>
             <p:spPr>
               <a:xfrm>
-                <a:off x="12852806" y="2513283"/>
-                <a:ext cx="73152" cy="51206"/>
+                <a:off x="12654272" y="1909267"/>
+                <a:ext cx="51206" cy="73152"/>
               </a:xfrm>
               <a:prstGeom prst="rect">
                 <a:avLst/>
@@ -5341,13 +5210,13 @@
           </p:sp>
           <p:sp>
             <p:nvSpPr>
-              <p:cNvPr id="100120" name="Restore.Chips.Chip1.Top4"/>
+              <p:cNvPr id="100117" name="Restore.Chips.Chip1.Bottom4"/>
               <p:cNvSpPr/>
               <p:nvPr/>
             </p:nvSpPr>
             <p:spPr>
               <a:xfrm>
-                <a:off x="12654272" y="1909267"/>
+                <a:off x="12654272" y="2845613"/>
                 <a:ext cx="51206" cy="73152"/>
               </a:xfrm>
               <a:prstGeom prst="rect">
@@ -5379,14 +5248,14 @@
           </p:sp>
           <p:sp>
             <p:nvSpPr>
-              <p:cNvPr id="100121" name="Restore.Chips.Chip1.Bottom4"/>
+              <p:cNvPr id="100118" name="Restore.Chips.Chip1.Left4"/>
               <p:cNvSpPr/>
               <p:nvPr/>
             </p:nvSpPr>
             <p:spPr>
               <a:xfrm>
-                <a:off x="12654272" y="2845613"/>
-                <a:ext cx="51206" cy="73152"/>
+                <a:off x="11916461" y="2647078"/>
+                <a:ext cx="73152" cy="51206"/>
               </a:xfrm>
               <a:prstGeom prst="rect">
                 <a:avLst/>
@@ -5417,13 +5286,13 @@
           </p:sp>
           <p:sp>
             <p:nvSpPr>
-              <p:cNvPr id="100122" name="Restore.Chips.Chip1.Left4"/>
+              <p:cNvPr id="100119" name="Restore.Chips.Chip1.Right4"/>
               <p:cNvSpPr/>
               <p:nvPr/>
             </p:nvSpPr>
             <p:spPr>
               <a:xfrm>
-                <a:off x="11916461" y="2647078"/>
+                <a:off x="12852806" y="2647078"/>
                 <a:ext cx="73152" cy="51206"/>
               </a:xfrm>
               <a:prstGeom prst="rect">
@@ -5455,45 +5324,7 @@
           </p:sp>
           <p:sp>
             <p:nvSpPr>
-              <p:cNvPr id="100123" name="Restore.Chips.Chip1.Right4"/>
-              <p:cNvSpPr/>
-              <p:nvPr/>
-            </p:nvSpPr>
-            <p:spPr>
-              <a:xfrm>
-                <a:off x="12852806" y="2647078"/>
-                <a:ext cx="73152" cy="51206"/>
-              </a:xfrm>
-              <a:prstGeom prst="rect">
-                <a:avLst/>
-              </a:prstGeom>
-              <a:solidFill>
-                <a:srgbClr val="183B56"/>
-              </a:solidFill>
-              <a:ln>
-                <a:noFill/>
-              </a:ln>
-            </p:spPr>
-            <p:txBody>
-              <a:bodyPr lIns="0" tIns="0" rIns="0" bIns="0" anchor="ctr">
-                <a:noAutofit/>
-              </a:bodyPr>
-              <a:lstStyle/>
-              <a:p>
-                <a:pPr algn="ctr"/>
-                <a:endParaRPr lang="en-US" sz="1800">
-                  <a:solidFill>
-                    <a:srgbClr val="183B56"/>
-                  </a:solidFill>
-                  <a:latin typeface="Arial"/>
-                  <a:ea typeface="Arial"/>
-                </a:endParaRPr>
-              </a:p>
-            </p:txBody>
-          </p:sp>
-          <p:sp>
-            <p:nvSpPr>
-              <p:cNvPr id="100124" name="Restore.Chips.Chip1.Body"/>
+              <p:cNvPr id="100120" name="Restore.Chips.Chip1.Body"/>
               <p:cNvSpPr/>
               <p:nvPr/>
             </p:nvSpPr>
@@ -5536,36 +5367,34 @@
         </p:grpSp>
         <p:grpSp>
           <p:nvGrpSpPr>
-            <p:cNvPr id="100149" name="Restore.Chips.Chip0"/>
+            <p:cNvPr id="100144" name="Restore.Chips.Chip0"/>
             <p:cNvGrpSpPr/>
             <p:nvPr/>
           </p:nvGrpSpPr>
           <p:grpSpPr>
             <a:xfrm>
-              <a:off x="11638483" y="2128723"/>
-              <a:ext cx="1068019" cy="1068019"/>
-              <a:chOff x="11638483" y="2128723"/>
-              <a:chExt cx="1068019" cy="1068019"/>
+              <a:off x="11667744" y="2157984"/>
+              <a:ext cx="1009498" cy="1009498"/>
+              <a:chOff x="11667744" y="2157984"/>
+              <a:chExt cx="1009498" cy="1009498"/>
             </a:xfrm>
           </p:grpSpPr>
           <p:sp>
             <p:nvSpPr>
-              <p:cNvPr id="100126" name="Restore.Chips.Chip0.Halo"/>
+              <p:cNvPr id="100122" name="Restore.Chips.Chip0.Top0"/>
               <p:cNvSpPr/>
               <p:nvPr/>
             </p:nvSpPr>
             <p:spPr>
               <a:xfrm>
-                <a:off x="11638483" y="2128723"/>
-                <a:ext cx="1068019" cy="1068019"/>
+                <a:off x="11870375" y="2157984"/>
+                <a:ext cx="51206" cy="73152"/>
               </a:xfrm>
-              <a:prstGeom prst="roundRect">
-                <a:avLst>
-                  <a:gd name="adj" fmla="val 4500"/>
-                </a:avLst>
+              <a:prstGeom prst="rect">
+                <a:avLst/>
               </a:prstGeom>
               <a:solidFill>
-                <a:srgbClr val="EAF4F3"/>
+                <a:srgbClr val="183B56"/>
               </a:solidFill>
               <a:ln>
                 <a:noFill/>
@@ -5590,13 +5419,13 @@
           </p:sp>
           <p:sp>
             <p:nvSpPr>
-              <p:cNvPr id="100127" name="Restore.Chips.Chip0.Top0"/>
+              <p:cNvPr id="100123" name="Restore.Chips.Chip0.Bottom0"/>
               <p:cNvSpPr/>
               <p:nvPr/>
             </p:nvSpPr>
             <p:spPr>
               <a:xfrm>
-                <a:off x="11870375" y="2157984"/>
+                <a:off x="11870375" y="3094330"/>
                 <a:ext cx="51206" cy="73152"/>
               </a:xfrm>
               <a:prstGeom prst="rect">
@@ -5628,14 +5457,14 @@
           </p:sp>
           <p:sp>
             <p:nvSpPr>
-              <p:cNvPr id="100128" name="Restore.Chips.Chip0.Bottom0"/>
+              <p:cNvPr id="100124" name="Restore.Chips.Chip0.Left0"/>
               <p:cNvSpPr/>
               <p:nvPr/>
             </p:nvSpPr>
             <p:spPr>
               <a:xfrm>
-                <a:off x="11870375" y="3094330"/>
-                <a:ext cx="51206" cy="73152"/>
+                <a:off x="11667744" y="2360615"/>
+                <a:ext cx="73152" cy="51206"/>
               </a:xfrm>
               <a:prstGeom prst="rect">
                 <a:avLst/>
@@ -5666,13 +5495,13 @@
           </p:sp>
           <p:sp>
             <p:nvSpPr>
-              <p:cNvPr id="100129" name="Restore.Chips.Chip0.Left0"/>
+              <p:cNvPr id="100125" name="Restore.Chips.Chip0.Right0"/>
               <p:cNvSpPr/>
               <p:nvPr/>
             </p:nvSpPr>
             <p:spPr>
               <a:xfrm>
-                <a:off x="11667744" y="2360615"/>
+                <a:off x="12604090" y="2360615"/>
                 <a:ext cx="73152" cy="51206"/>
               </a:xfrm>
               <a:prstGeom prst="rect">
@@ -5704,14 +5533,14 @@
           </p:sp>
           <p:sp>
             <p:nvSpPr>
-              <p:cNvPr id="100130" name="Restore.Chips.Chip0.Right0"/>
+              <p:cNvPr id="100126" name="Restore.Chips.Chip0.Top1"/>
               <p:cNvSpPr/>
               <p:nvPr/>
             </p:nvSpPr>
             <p:spPr>
               <a:xfrm>
-                <a:off x="12604090" y="2360615"/>
-                <a:ext cx="73152" cy="51206"/>
+                <a:off x="12004170" y="2157984"/>
+                <a:ext cx="51206" cy="73152"/>
               </a:xfrm>
               <a:prstGeom prst="rect">
                 <a:avLst/>
@@ -5742,13 +5571,13 @@
           </p:sp>
           <p:sp>
             <p:nvSpPr>
-              <p:cNvPr id="100131" name="Restore.Chips.Chip0.Top1"/>
+              <p:cNvPr id="100127" name="Restore.Chips.Chip0.Bottom1"/>
               <p:cNvSpPr/>
               <p:nvPr/>
             </p:nvSpPr>
             <p:spPr>
               <a:xfrm>
-                <a:off x="12004170" y="2157984"/>
+                <a:off x="12004170" y="3094330"/>
                 <a:ext cx="51206" cy="73152"/>
               </a:xfrm>
               <a:prstGeom prst="rect">
@@ -5780,14 +5609,14 @@
           </p:sp>
           <p:sp>
             <p:nvSpPr>
-              <p:cNvPr id="100132" name="Restore.Chips.Chip0.Bottom1"/>
+              <p:cNvPr id="100128" name="Restore.Chips.Chip0.Left1"/>
               <p:cNvSpPr/>
               <p:nvPr/>
             </p:nvSpPr>
             <p:spPr>
               <a:xfrm>
-                <a:off x="12004170" y="3094330"/>
-                <a:ext cx="51206" cy="73152"/>
+                <a:off x="11667744" y="2494410"/>
+                <a:ext cx="73152" cy="51206"/>
               </a:xfrm>
               <a:prstGeom prst="rect">
                 <a:avLst/>
@@ -5818,13 +5647,13 @@
           </p:sp>
           <p:sp>
             <p:nvSpPr>
-              <p:cNvPr id="100133" name="Restore.Chips.Chip0.Left1"/>
+              <p:cNvPr id="100129" name="Restore.Chips.Chip0.Right1"/>
               <p:cNvSpPr/>
               <p:nvPr/>
             </p:nvSpPr>
             <p:spPr>
               <a:xfrm>
-                <a:off x="11667744" y="2494410"/>
+                <a:off x="12604090" y="2494410"/>
                 <a:ext cx="73152" cy="51206"/>
               </a:xfrm>
               <a:prstGeom prst="rect">
@@ -5856,14 +5685,14 @@
           </p:sp>
           <p:sp>
             <p:nvSpPr>
-              <p:cNvPr id="100134" name="Restore.Chips.Chip0.Right1"/>
+              <p:cNvPr id="100130" name="Restore.Chips.Chip0.Top2"/>
               <p:cNvSpPr/>
               <p:nvPr/>
             </p:nvSpPr>
             <p:spPr>
               <a:xfrm>
-                <a:off x="12604090" y="2494410"/>
-                <a:ext cx="73152" cy="51206"/>
+                <a:off x="12137965" y="2157984"/>
+                <a:ext cx="51206" cy="73152"/>
               </a:xfrm>
               <a:prstGeom prst="rect">
                 <a:avLst/>
@@ -5894,13 +5723,13 @@
           </p:sp>
           <p:sp>
             <p:nvSpPr>
-              <p:cNvPr id="100135" name="Restore.Chips.Chip0.Top2"/>
+              <p:cNvPr id="100131" name="Restore.Chips.Chip0.Bottom2"/>
               <p:cNvSpPr/>
               <p:nvPr/>
             </p:nvSpPr>
             <p:spPr>
               <a:xfrm>
-                <a:off x="12137965" y="2157984"/>
+                <a:off x="12137965" y="3094330"/>
                 <a:ext cx="51206" cy="73152"/>
               </a:xfrm>
               <a:prstGeom prst="rect">
@@ -5932,14 +5761,14 @@
           </p:sp>
           <p:sp>
             <p:nvSpPr>
-              <p:cNvPr id="100136" name="Restore.Chips.Chip0.Bottom2"/>
+              <p:cNvPr id="100132" name="Restore.Chips.Chip0.Left2"/>
               <p:cNvSpPr/>
               <p:nvPr/>
             </p:nvSpPr>
             <p:spPr>
               <a:xfrm>
-                <a:off x="12137965" y="3094330"/>
-                <a:ext cx="51206" cy="73152"/>
+                <a:off x="11667744" y="2628205"/>
+                <a:ext cx="73152" cy="51206"/>
               </a:xfrm>
               <a:prstGeom prst="rect">
                 <a:avLst/>
@@ -5970,13 +5799,13 @@
           </p:sp>
           <p:sp>
             <p:nvSpPr>
-              <p:cNvPr id="100137" name="Restore.Chips.Chip0.Left2"/>
+              <p:cNvPr id="100133" name="Restore.Chips.Chip0.Right2"/>
               <p:cNvSpPr/>
               <p:nvPr/>
             </p:nvSpPr>
             <p:spPr>
               <a:xfrm>
-                <a:off x="11667744" y="2628205"/>
+                <a:off x="12604090" y="2628205"/>
                 <a:ext cx="73152" cy="51206"/>
               </a:xfrm>
               <a:prstGeom prst="rect">
@@ -6008,14 +5837,14 @@
           </p:sp>
           <p:sp>
             <p:nvSpPr>
-              <p:cNvPr id="100138" name="Restore.Chips.Chip0.Right2"/>
+              <p:cNvPr id="100134" name="Restore.Chips.Chip0.Top3"/>
               <p:cNvSpPr/>
               <p:nvPr/>
             </p:nvSpPr>
             <p:spPr>
               <a:xfrm>
-                <a:off x="12604090" y="2628205"/>
-                <a:ext cx="73152" cy="51206"/>
+                <a:off x="12271760" y="2157984"/>
+                <a:ext cx="51206" cy="73152"/>
               </a:xfrm>
               <a:prstGeom prst="rect">
                 <a:avLst/>
@@ -6046,13 +5875,13 @@
           </p:sp>
           <p:sp>
             <p:nvSpPr>
-              <p:cNvPr id="100139" name="Restore.Chips.Chip0.Top3"/>
+              <p:cNvPr id="100135" name="Restore.Chips.Chip0.Bottom3"/>
               <p:cNvSpPr/>
               <p:nvPr/>
             </p:nvSpPr>
             <p:spPr>
               <a:xfrm>
-                <a:off x="12271760" y="2157984"/>
+                <a:off x="12271760" y="3094330"/>
                 <a:ext cx="51206" cy="73152"/>
               </a:xfrm>
               <a:prstGeom prst="rect">
@@ -6084,14 +5913,14 @@
           </p:sp>
           <p:sp>
             <p:nvSpPr>
-              <p:cNvPr id="100140" name="Restore.Chips.Chip0.Bottom3"/>
+              <p:cNvPr id="100136" name="Restore.Chips.Chip0.Left3"/>
               <p:cNvSpPr/>
               <p:nvPr/>
             </p:nvSpPr>
             <p:spPr>
               <a:xfrm>
-                <a:off x="12271760" y="3094330"/>
-                <a:ext cx="51206" cy="73152"/>
+                <a:off x="11667744" y="2762000"/>
+                <a:ext cx="73152" cy="51206"/>
               </a:xfrm>
               <a:prstGeom prst="rect">
                 <a:avLst/>
@@ -6122,13 +5951,13 @@
           </p:sp>
           <p:sp>
             <p:nvSpPr>
-              <p:cNvPr id="100141" name="Restore.Chips.Chip0.Left3"/>
+              <p:cNvPr id="100137" name="Restore.Chips.Chip0.Right3"/>
               <p:cNvSpPr/>
               <p:nvPr/>
             </p:nvSpPr>
             <p:spPr>
               <a:xfrm>
-                <a:off x="11667744" y="2762000"/>
+                <a:off x="12604090" y="2762000"/>
                 <a:ext cx="73152" cy="51206"/>
               </a:xfrm>
               <a:prstGeom prst="rect">
@@ -6160,14 +5989,14 @@
           </p:sp>
           <p:sp>
             <p:nvSpPr>
-              <p:cNvPr id="100142" name="Restore.Chips.Chip0.Right3"/>
+              <p:cNvPr id="100138" name="Restore.Chips.Chip0.Top4"/>
               <p:cNvSpPr/>
               <p:nvPr/>
             </p:nvSpPr>
             <p:spPr>
               <a:xfrm>
-                <a:off x="12604090" y="2762000"/>
-                <a:ext cx="73152" cy="51206"/>
+                <a:off x="12405555" y="2157984"/>
+                <a:ext cx="51206" cy="73152"/>
               </a:xfrm>
               <a:prstGeom prst="rect">
                 <a:avLst/>
@@ -6198,13 +6027,13 @@
           </p:sp>
           <p:sp>
             <p:nvSpPr>
-              <p:cNvPr id="100143" name="Restore.Chips.Chip0.Top4"/>
+              <p:cNvPr id="100139" name="Restore.Chips.Chip0.Bottom4"/>
               <p:cNvSpPr/>
               <p:nvPr/>
             </p:nvSpPr>
             <p:spPr>
               <a:xfrm>
-                <a:off x="12405555" y="2157984"/>
+                <a:off x="12405555" y="3094330"/>
                 <a:ext cx="51206" cy="73152"/>
               </a:xfrm>
               <a:prstGeom prst="rect">
@@ -6236,14 +6065,14 @@
           </p:sp>
           <p:sp>
             <p:nvSpPr>
-              <p:cNvPr id="100144" name="Restore.Chips.Chip0.Bottom4"/>
+              <p:cNvPr id="100140" name="Restore.Chips.Chip0.Left4"/>
               <p:cNvSpPr/>
               <p:nvPr/>
             </p:nvSpPr>
             <p:spPr>
               <a:xfrm>
-                <a:off x="12405555" y="3094330"/>
-                <a:ext cx="51206" cy="73152"/>
+                <a:off x="11667744" y="2895795"/>
+                <a:ext cx="73152" cy="51206"/>
               </a:xfrm>
               <a:prstGeom prst="rect">
                 <a:avLst/>
@@ -6274,13 +6103,13 @@
           </p:sp>
           <p:sp>
             <p:nvSpPr>
-              <p:cNvPr id="100145" name="Restore.Chips.Chip0.Left4"/>
+              <p:cNvPr id="100141" name="Restore.Chips.Chip0.Right4"/>
               <p:cNvSpPr/>
               <p:nvPr/>
             </p:nvSpPr>
             <p:spPr>
               <a:xfrm>
-                <a:off x="11667744" y="2895795"/>
+                <a:off x="12604090" y="2895795"/>
                 <a:ext cx="73152" cy="51206"/>
               </a:xfrm>
               <a:prstGeom prst="rect">
@@ -6312,45 +6141,7 @@
           </p:sp>
           <p:sp>
             <p:nvSpPr>
-              <p:cNvPr id="100146" name="Restore.Chips.Chip0.Right4"/>
-              <p:cNvSpPr/>
-              <p:nvPr/>
-            </p:nvSpPr>
-            <p:spPr>
-              <a:xfrm>
-                <a:off x="12604090" y="2895795"/>
-                <a:ext cx="73152" cy="51206"/>
-              </a:xfrm>
-              <a:prstGeom prst="rect">
-                <a:avLst/>
-              </a:prstGeom>
-              <a:solidFill>
-                <a:srgbClr val="183B56"/>
-              </a:solidFill>
-              <a:ln>
-                <a:noFill/>
-              </a:ln>
-            </p:spPr>
-            <p:txBody>
-              <a:bodyPr lIns="0" tIns="0" rIns="0" bIns="0" anchor="ctr">
-                <a:noAutofit/>
-              </a:bodyPr>
-              <a:lstStyle/>
-              <a:p>
-                <a:pPr algn="ctr"/>
-                <a:endParaRPr lang="en-US" sz="1800">
-                  <a:solidFill>
-                    <a:srgbClr val="183B56"/>
-                  </a:solidFill>
-                  <a:latin typeface="Arial"/>
-                  <a:ea typeface="Arial"/>
-                </a:endParaRPr>
-              </a:p>
-            </p:txBody>
-          </p:sp>
-          <p:sp>
-            <p:nvSpPr>
-              <p:cNvPr id="100147" name="Restore.Chips.Chip0.Body"/>
+              <p:cNvPr id="100142" name="Restore.Chips.Chip0.Body"/>
               <p:cNvSpPr/>
               <p:nvPr/>
             </p:nvSpPr>
@@ -6392,7 +6183,7 @@
           </p:sp>
           <p:sp>
             <p:nvSpPr>
-              <p:cNvPr id="100148" name="Restore.Chips.Chip0.Label"/>
+              <p:cNvPr id="100143" name="Restore.Chips.Chip0.Label"/>
               <p:cNvSpPr txBox="1"/>
               <p:nvPr/>
             </p:nvSpPr>
@@ -6433,7 +6224,7 @@
       </p:grpSp>
       <p:sp>
         <p:nvSpPr>
-          <p:cNvPr id="100151" name="Restore.Description"/>
+          <p:cNvPr id="100146" name="Restore.Description"/>
           <p:cNvSpPr txBox="1"/>
           <p:nvPr/>
         </p:nvSpPr>
@@ -6485,7 +6276,7 @@
       </p:sp>
       <p:sp>
         <p:nvSpPr>
-          <p:cNvPr id="100152" name="Replay.Panel"/>
+          <p:cNvPr id="100147" name="Replay.Panel"/>
           <p:cNvSpPr/>
           <p:nvPr/>
         </p:nvSpPr>
@@ -6527,7 +6318,7 @@
       </p:sp>
       <p:sp>
         <p:nvSpPr>
-          <p:cNvPr id="100153" name="Replay.Title"/>
+          <p:cNvPr id="100148" name="Replay.Title"/>
           <p:cNvSpPr txBox="1"/>
           <p:nvPr/>
         </p:nvSpPr>
@@ -6566,7 +6357,7 @@
       </p:sp>
       <p:sp>
         <p:nvSpPr>
-          <p:cNvPr id="100154" name="Replay.Monitor"/>
+          <p:cNvPr id="100149" name="Replay.Monitor"/>
           <p:cNvSpPr/>
           <p:nvPr/>
         </p:nvSpPr>
@@ -6608,7 +6399,7 @@
       </p:sp>
       <p:sp>
         <p:nvSpPr>
-          <p:cNvPr id="100155" name="Replay.Screen"/>
+          <p:cNvPr id="100150" name="Replay.Screen"/>
           <p:cNvSpPr/>
           <p:nvPr/>
         </p:nvSpPr>
@@ -6646,7 +6437,7 @@
       </p:sp>
       <p:cxnSp>
         <p:nvCxnSpPr>
-          <p:cNvPr id="100156" name="Replay.Trace0.0"/>
+          <p:cNvPr id="100151" name="Replay.Trace0.0"/>
           <p:cNvCxnSpPr/>
           <p:nvPr/>
         </p:nvCxnSpPr>
@@ -6670,7 +6461,7 @@
       </p:cxnSp>
       <p:cxnSp>
         <p:nvCxnSpPr>
-          <p:cNvPr id="100157" name="Replay.Trace0.1"/>
+          <p:cNvPr id="100152" name="Replay.Trace0.1"/>
           <p:cNvCxnSpPr/>
           <p:nvPr/>
         </p:nvCxnSpPr>
@@ -6694,7 +6485,7 @@
       </p:cxnSp>
       <p:cxnSp>
         <p:nvCxnSpPr>
-          <p:cNvPr id="100158" name="Replay.Trace0.2"/>
+          <p:cNvPr id="100153" name="Replay.Trace0.2"/>
           <p:cNvCxnSpPr/>
           <p:nvPr/>
         </p:nvCxnSpPr>
@@ -6718,7 +6509,7 @@
       </p:cxnSp>
       <p:cxnSp>
         <p:nvCxnSpPr>
-          <p:cNvPr id="100159" name="Replay.Trace0.3"/>
+          <p:cNvPr id="100154" name="Replay.Trace0.3"/>
           <p:cNvCxnSpPr/>
           <p:nvPr/>
         </p:nvCxnSpPr>
@@ -6742,7 +6533,7 @@
       </p:cxnSp>
       <p:cxnSp>
         <p:nvCxnSpPr>
-          <p:cNvPr id="100160" name="Replay.Trace0.4"/>
+          <p:cNvPr id="100155" name="Replay.Trace0.4"/>
           <p:cNvCxnSpPr/>
           <p:nvPr/>
         </p:nvCxnSpPr>
@@ -6766,7 +6557,7 @@
       </p:cxnSp>
       <p:cxnSp>
         <p:nvCxnSpPr>
-          <p:cNvPr id="100161" name="Replay.Trace0.5"/>
+          <p:cNvPr id="100156" name="Replay.Trace0.5"/>
           <p:cNvCxnSpPr/>
           <p:nvPr/>
         </p:nvCxnSpPr>
@@ -6790,7 +6581,7 @@
       </p:cxnSp>
       <p:cxnSp>
         <p:nvCxnSpPr>
-          <p:cNvPr id="100162" name="Replay.Trace0.6"/>
+          <p:cNvPr id="100157" name="Replay.Trace0.6"/>
           <p:cNvCxnSpPr/>
           <p:nvPr/>
         </p:nvCxnSpPr>
@@ -6814,7 +6605,7 @@
       </p:cxnSp>
       <p:cxnSp>
         <p:nvCxnSpPr>
-          <p:cNvPr id="100163" name="Replay.Trace0.7"/>
+          <p:cNvPr id="100158" name="Replay.Trace0.7"/>
           <p:cNvCxnSpPr/>
           <p:nvPr/>
         </p:nvCxnSpPr>
@@ -6838,7 +6629,7 @@
       </p:cxnSp>
       <p:cxnSp>
         <p:nvCxnSpPr>
-          <p:cNvPr id="100164" name="Replay.Trace0.8"/>
+          <p:cNvPr id="100159" name="Replay.Trace0.8"/>
           <p:cNvCxnSpPr/>
           <p:nvPr/>
         </p:nvCxnSpPr>
@@ -6862,7 +6653,7 @@
       </p:cxnSp>
       <p:cxnSp>
         <p:nvCxnSpPr>
-          <p:cNvPr id="100165" name="Replay.Trace0.9"/>
+          <p:cNvPr id="100160" name="Replay.Trace0.9"/>
           <p:cNvCxnSpPr/>
           <p:nvPr/>
         </p:nvCxnSpPr>
@@ -6886,7 +6677,7 @@
       </p:cxnSp>
       <p:cxnSp>
         <p:nvCxnSpPr>
-          <p:cNvPr id="100166" name="Replay.Trace0.10"/>
+          <p:cNvPr id="100161" name="Replay.Trace0.10"/>
           <p:cNvCxnSpPr/>
           <p:nvPr/>
         </p:nvCxnSpPr>
@@ -6910,7 +6701,7 @@
       </p:cxnSp>
       <p:cxnSp>
         <p:nvCxnSpPr>
-          <p:cNvPr id="100167" name="Replay.Trace0.11"/>
+          <p:cNvPr id="100162" name="Replay.Trace0.11"/>
           <p:cNvCxnSpPr/>
           <p:nvPr/>
         </p:nvCxnSpPr>
@@ -6934,7 +6725,7 @@
       </p:cxnSp>
       <p:cxnSp>
         <p:nvCxnSpPr>
-          <p:cNvPr id="100168" name="Replay.Trace0.12"/>
+          <p:cNvPr id="100163" name="Replay.Trace0.12"/>
           <p:cNvCxnSpPr/>
           <p:nvPr/>
         </p:nvCxnSpPr>
@@ -6958,7 +6749,7 @@
       </p:cxnSp>
       <p:cxnSp>
         <p:nvCxnSpPr>
-          <p:cNvPr id="100169" name="Replay.Trace0.13"/>
+          <p:cNvPr id="100164" name="Replay.Trace0.13"/>
           <p:cNvCxnSpPr/>
           <p:nvPr/>
         </p:nvCxnSpPr>
@@ -6982,7 +6773,7 @@
       </p:cxnSp>
       <p:cxnSp>
         <p:nvCxnSpPr>
-          <p:cNvPr id="100170" name="Replay.Trace0.14"/>
+          <p:cNvPr id="100165" name="Replay.Trace0.14"/>
           <p:cNvCxnSpPr/>
           <p:nvPr/>
         </p:nvCxnSpPr>
@@ -7006,7 +6797,7 @@
       </p:cxnSp>
       <p:cxnSp>
         <p:nvCxnSpPr>
-          <p:cNvPr id="100171" name="Replay.Trace1.0"/>
+          <p:cNvPr id="100166" name="Replay.Trace1.0"/>
           <p:cNvCxnSpPr/>
           <p:nvPr/>
         </p:nvCxnSpPr>
@@ -7030,7 +6821,7 @@
       </p:cxnSp>
       <p:cxnSp>
         <p:nvCxnSpPr>
-          <p:cNvPr id="100172" name="Replay.Trace1.1"/>
+          <p:cNvPr id="100167" name="Replay.Trace1.1"/>
           <p:cNvCxnSpPr/>
           <p:nvPr/>
         </p:nvCxnSpPr>
@@ -7054,7 +6845,7 @@
       </p:cxnSp>
       <p:cxnSp>
         <p:nvCxnSpPr>
-          <p:cNvPr id="100173" name="Replay.Trace1.2"/>
+          <p:cNvPr id="100168" name="Replay.Trace1.2"/>
           <p:cNvCxnSpPr/>
           <p:nvPr/>
         </p:nvCxnSpPr>
@@ -7078,7 +6869,7 @@
       </p:cxnSp>
       <p:cxnSp>
         <p:nvCxnSpPr>
-          <p:cNvPr id="100174" name="Replay.Trace1.3"/>
+          <p:cNvPr id="100169" name="Replay.Trace1.3"/>
           <p:cNvCxnSpPr/>
           <p:nvPr/>
         </p:nvCxnSpPr>
@@ -7102,7 +6893,7 @@
       </p:cxnSp>
       <p:cxnSp>
         <p:nvCxnSpPr>
-          <p:cNvPr id="100175" name="Replay.Trace1.4"/>
+          <p:cNvPr id="100170" name="Replay.Trace1.4"/>
           <p:cNvCxnSpPr/>
           <p:nvPr/>
         </p:nvCxnSpPr>
@@ -7126,7 +6917,7 @@
       </p:cxnSp>
       <p:cxnSp>
         <p:nvCxnSpPr>
-          <p:cNvPr id="100176" name="Replay.Trace1.5"/>
+          <p:cNvPr id="100171" name="Replay.Trace1.5"/>
           <p:cNvCxnSpPr/>
           <p:nvPr/>
         </p:nvCxnSpPr>
@@ -7150,7 +6941,7 @@
       </p:cxnSp>
       <p:cxnSp>
         <p:nvCxnSpPr>
-          <p:cNvPr id="100177" name="Replay.Trace1.6"/>
+          <p:cNvPr id="100172" name="Replay.Trace1.6"/>
           <p:cNvCxnSpPr/>
           <p:nvPr/>
         </p:nvCxnSpPr>
@@ -7174,7 +6965,7 @@
       </p:cxnSp>
       <p:cxnSp>
         <p:nvCxnSpPr>
-          <p:cNvPr id="100178" name="Replay.Trace1.7"/>
+          <p:cNvPr id="100173" name="Replay.Trace1.7"/>
           <p:cNvCxnSpPr/>
           <p:nvPr/>
         </p:nvCxnSpPr>
@@ -7198,7 +6989,7 @@
       </p:cxnSp>
       <p:cxnSp>
         <p:nvCxnSpPr>
-          <p:cNvPr id="100179" name="Replay.Trace1.8"/>
+          <p:cNvPr id="100174" name="Replay.Trace1.8"/>
           <p:cNvCxnSpPr/>
           <p:nvPr/>
         </p:nvCxnSpPr>
@@ -7222,7 +7013,7 @@
       </p:cxnSp>
       <p:cxnSp>
         <p:nvCxnSpPr>
-          <p:cNvPr id="100180" name="Replay.Trace1.9"/>
+          <p:cNvPr id="100175" name="Replay.Trace1.9"/>
           <p:cNvCxnSpPr/>
           <p:nvPr/>
         </p:nvCxnSpPr>
@@ -7246,7 +7037,7 @@
       </p:cxnSp>
       <p:cxnSp>
         <p:nvCxnSpPr>
-          <p:cNvPr id="100181" name="Replay.Trace1.10"/>
+          <p:cNvPr id="100176" name="Replay.Trace1.10"/>
           <p:cNvCxnSpPr/>
           <p:nvPr/>
         </p:nvCxnSpPr>
@@ -7270,7 +7061,7 @@
       </p:cxnSp>
       <p:cxnSp>
         <p:nvCxnSpPr>
-          <p:cNvPr id="100182" name="Replay.Trace1.11"/>
+          <p:cNvPr id="100177" name="Replay.Trace1.11"/>
           <p:cNvCxnSpPr/>
           <p:nvPr/>
         </p:nvCxnSpPr>
@@ -7294,7 +7085,7 @@
       </p:cxnSp>
       <p:cxnSp>
         <p:nvCxnSpPr>
-          <p:cNvPr id="100183" name="Replay.Trace1.12"/>
+          <p:cNvPr id="100178" name="Replay.Trace1.12"/>
           <p:cNvCxnSpPr/>
           <p:nvPr/>
         </p:nvCxnSpPr>
@@ -7318,7 +7109,7 @@
       </p:cxnSp>
       <p:cxnSp>
         <p:nvCxnSpPr>
-          <p:cNvPr id="100184" name="Replay.Trace1.13"/>
+          <p:cNvPr id="100179" name="Replay.Trace1.13"/>
           <p:cNvCxnSpPr/>
           <p:nvPr/>
         </p:nvCxnSpPr>
@@ -7342,7 +7133,7 @@
       </p:cxnSp>
       <p:cxnSp>
         <p:nvCxnSpPr>
-          <p:cNvPr id="100185" name="Replay.Trace1.14"/>
+          <p:cNvPr id="100180" name="Replay.Trace1.14"/>
           <p:cNvCxnSpPr/>
           <p:nvPr/>
         </p:nvCxnSpPr>
@@ -7366,7 +7157,7 @@
       </p:cxnSp>
       <p:sp>
         <p:nvSpPr>
-          <p:cNvPr id="100186" name="Replay.Stand"/>
+          <p:cNvPr id="100181" name="Replay.Stand"/>
           <p:cNvSpPr/>
           <p:nvPr/>
         </p:nvSpPr>
@@ -7404,7 +7195,7 @@
       </p:sp>
       <p:sp>
         <p:nvSpPr>
-          <p:cNvPr id="100187" name="Replay.Foot"/>
+          <p:cNvPr id="100182" name="Replay.Foot"/>
           <p:cNvSpPr/>
           <p:nvPr/>
         </p:nvSpPr>
@@ -7442,7 +7233,7 @@
       </p:sp>
       <p:sp>
         <p:nvSpPr>
-          <p:cNvPr id="100188" name="Replay.Description"/>
+          <p:cNvPr id="100183" name="Replay.Description"/>
           <p:cNvSpPr txBox="1"/>
           <p:nvPr/>
         </p:nvSpPr>
@@ -7494,7 +7285,7 @@
       </p:sp>
       <p:cxnSp>
         <p:nvCxnSpPr>
-          <p:cNvPr id="100189" name="Mapping.AuxA"/>
+          <p:cNvPr id="100184" name="Mapping.AuxA"/>
           <p:cNvCxnSpPr/>
           <p:nvPr/>
         </p:nvCxnSpPr>
@@ -7518,7 +7309,7 @@
       </p:cxnSp>
       <p:cxnSp>
         <p:nvCxnSpPr>
-          <p:cNvPr id="100190" name="Mapping.AuxB"/>
+          <p:cNvPr id="100185" name="Mapping.AuxB"/>
           <p:cNvCxnSpPr/>
           <p:nvPr/>
         </p:nvCxnSpPr>
@@ -7542,7 +7333,7 @@
       </p:cxnSp>
       <p:cxnSp>
         <p:nvCxnSpPr>
-          <p:cNvPr id="100191" name="Mapping.AuxC"/>
+          <p:cNvPr id="100186" name="Mapping.AuxC"/>
           <p:cNvCxnSpPr/>
           <p:nvPr/>
         </p:nvCxnSpPr>
